--- a/classes/parte-3-hacking-etico-y-pentesting-metodologia/068-reconocimiento-pasivo-e-inteligencia-de-fuentes-abiertas/clase-068-presentacion.pptx
+++ b/classes/parte-3-hacking-etico-y-pentesting-metodologia/068-reconocimiento-pasivo-e-inteligencia-de-fuentes-abiertas/clase-068-presentacion.pptx
@@ -17,6 +17,9 @@
     <p:sldId id="265" r:id="rId16"/>
     <p:sldId id="266" r:id="rId17"/>
     <p:sldId id="267" r:id="rId18"/>
+    <p:sldId id="268" r:id="rId19"/>
+    <p:sldId id="269" r:id="rId20"/>
+    <p:sldId id="270" r:id="rId21"/>
   </p:sldIdLst>
   <p:sldSz cx="9144000" cy="6858000" type="screen4x3"/>
   <p:notesSz cx="6858000" cy="9144000"/>
@@ -3198,7 +3201,7 @@
                   <a:srgbClr val="0B3D2E"/>
                 </a:solidFill>
               </a:rPr>
-              <a:t>⚠️ Errores comunes</a:t>
+              <a:t>✍️ Ejercicios</a:t>
             </a:r>
           </a:p>
         </p:txBody>
@@ -3236,67 +3239,82 @@
                   <a:srgbClr val="22282E"/>
                 </a:solidFill>
               </a:rPr>
-              <a:t>•  theHarvester no devuelve nada — Fuente saturada o sin API key; cambia -b a otra fuente</a:t>
-            </a:r>
-          </a:p>
-          <a:p>
-            <a:pPr>
-              <a:spcAft>
-                <a:spcPts val="600"/>
-              </a:spcAft>
-            </a:pPr>
-            <a:r>
-              <a:rPr sz="1500">
-                <a:solidFill>
-                  <a:srgbClr val="22282E"/>
-                </a:solidFill>
-              </a:rPr>
-              <a:t>•  crt.sh sin resultados — Comodín mal escrito; usa %25.dominio.com (URL-encoded)</a:t>
-            </a:r>
-          </a:p>
-          <a:p>
-            <a:pPr>
-              <a:spcAft>
-                <a:spcPts val="600"/>
-              </a:spcAft>
-            </a:pPr>
-            <a:r>
-              <a:rPr sz="1500">
-                <a:solidFill>
-                  <a:srgbClr val="22282E"/>
-                </a:solidFill>
-              </a:rPr>
-              <a:t>•  Subdominios que no resuelven — Registros históricos; valida con dig antes de darlos por vivos</a:t>
-            </a:r>
-          </a:p>
-          <a:p>
-            <a:pPr>
-              <a:spcAft>
-                <a:spcPts val="600"/>
-              </a:spcAft>
-            </a:pPr>
-            <a:r>
-              <a:rPr sz="1500">
-                <a:solidFill>
-                  <a:srgbClr val="22282E"/>
-                </a:solidFill>
-              </a:rPr>
-              <a:t>•  Shodan sin datos — IP tras NAT/CDN; consulta el rango real o el CNAME</a:t>
-            </a:r>
-          </a:p>
-          <a:p>
-            <a:pPr>
-              <a:spcAft>
-                <a:spcPts val="600"/>
-              </a:spcAft>
-            </a:pPr>
-            <a:r>
-              <a:rPr sz="1500">
-                <a:solidFill>
-                  <a:srgbClr val="22282E"/>
-                </a:solidFill>
-              </a:rPr>
-              <a:t>•  Perfilar personas de más — Fuera de alcance; limita OSINT a lo autorizado</a:t>
+              <a:t>•  Encuentra tres subdominios de un dominio propio usando solo crt.sh.</a:t>
+            </a:r>
+          </a:p>
+          <a:p>
+            <a:pPr>
+              <a:spcAft>
+                <a:spcPts val="600"/>
+              </a:spcAft>
+            </a:pPr>
+            <a:r>
+              <a:rPr sz="1500">
+                <a:solidFill>
+                  <a:srgbClr val="22282E"/>
+                </a:solidFill>
+              </a:rPr>
+              <a:t>•  Escribe tres Google dorks para localizar documentos PDF de una organización.</a:t>
+            </a:r>
+          </a:p>
+          <a:p>
+            <a:pPr>
+              <a:spcAft>
+                <a:spcPts val="600"/>
+              </a:spcAft>
+            </a:pPr>
+            <a:r>
+              <a:rPr sz="1500">
+                <a:solidFill>
+                  <a:srgbClr val="22282E"/>
+                </a:solidFill>
+              </a:rPr>
+              <a:t>•  Extrae los registros MX y explica qué proveedor de correo usan.</a:t>
+            </a:r>
+          </a:p>
+          <a:p>
+            <a:pPr>
+              <a:spcAft>
+                <a:spcPts val="600"/>
+              </a:spcAft>
+            </a:pPr>
+            <a:r>
+              <a:rPr sz="1500">
+                <a:solidFill>
+                  <a:srgbClr val="22282E"/>
+                </a:solidFill>
+              </a:rPr>
+              <a:t>•  Compara el resultado de amass -passive con theHarvester: ¿qué aporta cada uno?</a:t>
+            </a:r>
+          </a:p>
+          <a:p>
+            <a:pPr>
+              <a:spcAft>
+                <a:spcPts val="600"/>
+              </a:spcAft>
+            </a:pPr>
+            <a:r>
+              <a:rPr sz="1500">
+                <a:solidFill>
+                  <a:srgbClr val="22282E"/>
+                </a:solidFill>
+              </a:rPr>
+              <a:t>•  Documenta qué metadatos podrías extraer de un PDF público (autor, software).</a:t>
+            </a:r>
+          </a:p>
+          <a:p>
+            <a:pPr>
+              <a:spcAft>
+                <a:spcPts val="600"/>
+              </a:spcAft>
+            </a:pPr>
+            <a:r>
+              <a:rPr sz="1500">
+                <a:solidFill>
+                  <a:srgbClr val="22282E"/>
+                </a:solidFill>
+              </a:rPr>
+              <a:t>•  Explica cómo un correo filtrado en una brecha se convierte en vector de acceso.</a:t>
             </a:r>
           </a:p>
         </p:txBody>
@@ -3347,7 +3365,7 @@
                   <a:srgbClr val="0B3D2E"/>
                 </a:solidFill>
               </a:rPr>
-              <a:t>❓ Preguntas frecuentes</a:t>
+              <a:t>📝 Reto verificable</a:t>
             </a:r>
           </a:p>
         </p:txBody>
@@ -3385,97 +3403,22 @@
                   <a:srgbClr val="22282E"/>
                 </a:solidFill>
               </a:rPr>
-              <a:t>•  ❓ ¿El reconocimiento pasivo es 100% indetectable?</a:t>
-            </a:r>
-          </a:p>
-          <a:p>
-            <a:pPr>
-              <a:spcAft>
-                <a:spcPts val="600"/>
-              </a:spcAft>
-            </a:pPr>
-            <a:r>
-              <a:rPr sz="1500">
-                <a:solidFill>
-                  <a:srgbClr val="22282E"/>
-                </a:solidFill>
-              </a:rPr>
-              <a:t>•  Casi. No genera tráfico contra el objetivo, pero consultas a terceros (Shodan, brechas) pueden dejar rastro en esos servicios, no en el objetivo. Aun así es mucho más sigiloso que el escaneo activo.</a:t>
-            </a:r>
-          </a:p>
-          <a:p>
-            <a:pPr>
-              <a:spcAft>
-                <a:spcPts val="600"/>
-              </a:spcAft>
-            </a:pPr>
-            <a:r>
-              <a:rPr sz="1500">
-                <a:solidFill>
-                  <a:srgbClr val="22282E"/>
-                </a:solidFill>
-              </a:rPr>
-              <a:t>•  ❓ ¿Es legal usar bases de datos de contraseñas filtradas?</a:t>
-            </a:r>
-          </a:p>
-          <a:p>
-            <a:pPr>
-              <a:spcAft>
-                <a:spcPts val="600"/>
-              </a:spcAft>
-            </a:pPr>
-            <a:r>
-              <a:rPr sz="1500">
-                <a:solidFill>
-                  <a:srgbClr val="22282E"/>
-                </a:solidFill>
-              </a:rPr>
-              <a:t>•  Consultar si un correo aparece en una brecha (p. ej. Have I Been Pwned) es legal e informativo. Usar esas contraseñas para acceder a cuentas reales fuera de tu laboratorio no lo es.</a:t>
-            </a:r>
-          </a:p>
-          <a:p>
-            <a:pPr>
-              <a:spcAft>
-                <a:spcPts val="600"/>
-              </a:spcAft>
-            </a:pPr>
-            <a:r>
-              <a:rPr sz="1500">
-                <a:solidFill>
-                  <a:srgbClr val="22282E"/>
-                </a:solidFill>
-              </a:rPr>
-              <a:t>•  ❓ ¿Qué diferencia hay entre amass pasivo y activo?</a:t>
-            </a:r>
-          </a:p>
-          <a:p>
-            <a:pPr>
-              <a:spcAft>
-                <a:spcPts val="600"/>
-              </a:spcAft>
-            </a:pPr>
-            <a:r>
-              <a:rPr sz="1500">
-                <a:solidFill>
-                  <a:srgbClr val="22282E"/>
-                </a:solidFill>
-              </a:rPr>
-              <a:t>•  -passive solo consulta fuentes de terceros; el modo activo resuelve y puede hacer brute force de DNS, generando tráfico. Para esta clase, quédate en pasivo.</a:t>
-            </a:r>
-          </a:p>
-          <a:p>
-            <a:pPr>
-              <a:spcAft>
-                <a:spcPts val="600"/>
-              </a:spcAft>
-            </a:pPr>
-            <a:r>
-              <a:rPr sz="1500">
-                <a:solidFill>
-                  <a:srgbClr val="22282E"/>
-                </a:solidFill>
-              </a:rPr>
-              <a:t>•  ❓ ¿Por qué importan los metadatos de documentos?</a:t>
+              <a:t>•  Genera un informe de reconocimiento pasivo de un dominio propio con: registros WHOIS/DNS, al menos cinco subdominios con su fuente, servicios expuestos y una lista de correos/usuarios candidatos.</a:t>
+            </a:r>
+          </a:p>
+          <a:p>
+            <a:pPr>
+              <a:spcAft>
+                <a:spcPts val="600"/>
+              </a:spcAft>
+            </a:pPr>
+            <a:r>
+              <a:rPr sz="1500">
+                <a:solidFill>
+                  <a:srgbClr val="22282E"/>
+                </a:solidFill>
+              </a:rPr>
+              <a:t>•  Criterio de aceptación: el informe lista ≥5 subdominios con la fuente de cada uno, incluye al menos un servicio expuesto identificado por Shodan/Censys y no contiene ninguna acción que haya generado…</a:t>
             </a:r>
           </a:p>
         </p:txBody>
@@ -3526,7 +3469,7 @@
                   <a:srgbClr val="0B3D2E"/>
                 </a:solidFill>
               </a:rPr>
-              <a:t>🔗 Referencias</a:t>
+              <a:t>⚠️ Errores comunes</a:t>
             </a:r>
           </a:p>
         </p:txBody>
@@ -3564,6 +3507,334 @@
                   <a:srgbClr val="22282E"/>
                 </a:solidFill>
               </a:rPr>
+              <a:t>•  theHarvester no devuelve nada — Fuente saturada o sin API key; cambia -b a otra fuente</a:t>
+            </a:r>
+          </a:p>
+          <a:p>
+            <a:pPr>
+              <a:spcAft>
+                <a:spcPts val="600"/>
+              </a:spcAft>
+            </a:pPr>
+            <a:r>
+              <a:rPr sz="1500">
+                <a:solidFill>
+                  <a:srgbClr val="22282E"/>
+                </a:solidFill>
+              </a:rPr>
+              <a:t>•  crt.sh sin resultados — Comodín mal escrito; usa %25.dominio.com (URL-encoded)</a:t>
+            </a:r>
+          </a:p>
+          <a:p>
+            <a:pPr>
+              <a:spcAft>
+                <a:spcPts val="600"/>
+              </a:spcAft>
+            </a:pPr>
+            <a:r>
+              <a:rPr sz="1500">
+                <a:solidFill>
+                  <a:srgbClr val="22282E"/>
+                </a:solidFill>
+              </a:rPr>
+              <a:t>•  Subdominios que no resuelven — Registros históricos; valida con dig antes de darlos por vivos</a:t>
+            </a:r>
+          </a:p>
+          <a:p>
+            <a:pPr>
+              <a:spcAft>
+                <a:spcPts val="600"/>
+              </a:spcAft>
+            </a:pPr>
+            <a:r>
+              <a:rPr sz="1500">
+                <a:solidFill>
+                  <a:srgbClr val="22282E"/>
+                </a:solidFill>
+              </a:rPr>
+              <a:t>•  Shodan sin datos — IP tras NAT/CDN; consulta el rango real o el CNAME</a:t>
+            </a:r>
+          </a:p>
+          <a:p>
+            <a:pPr>
+              <a:spcAft>
+                <a:spcPts val="600"/>
+              </a:spcAft>
+            </a:pPr>
+            <a:r>
+              <a:rPr sz="1500">
+                <a:solidFill>
+                  <a:srgbClr val="22282E"/>
+                </a:solidFill>
+              </a:rPr>
+              <a:t>•  Perfilar personas de más — Fuera de alcance; limita OSINT a lo autorizado</a:t>
+            </a:r>
+          </a:p>
+        </p:txBody>
+      </p:sp>
+    </p:spTree>
+  </p:cSld>
+  <p:clrMapOvr>
+    <a:masterClrMapping/>
+  </p:clrMapOvr>
+</p:sld>
+</file>
+
+<file path=ppt/slides/slide13.xml><?xml version="1.0" encoding="utf-8"?>
+<p:sld xmlns:a="http://schemas.openxmlformats.org/drawingml/2006/main" xmlns:p="http://schemas.openxmlformats.org/presentationml/2006/main" xmlns:r="http://schemas.openxmlformats.org/officeDocument/2006/relationships">
+  <p:cSld>
+    <p:spTree>
+      <p:nvGrpSpPr>
+        <p:cNvPr id="1" name=""/>
+        <p:cNvGrpSpPr/>
+        <p:nvPr/>
+      </p:nvGrpSpPr>
+      <p:grpSpPr/>
+      <p:sp>
+        <p:nvSpPr>
+          <p:cNvPr id="2" name="TextBox 1"/>
+          <p:cNvSpPr txBox="1"/>
+          <p:nvPr/>
+        </p:nvSpPr>
+        <p:spPr>
+          <a:xfrm>
+            <a:off x="457200" y="320040"/>
+            <a:ext cx="8229600" cy="822960"/>
+          </a:xfrm>
+          <a:prstGeom prst="rect">
+            <a:avLst/>
+          </a:prstGeom>
+          <a:noFill/>
+        </p:spPr>
+        <p:txBody>
+          <a:bodyPr wrap="square">
+            <a:spAutoFit/>
+          </a:bodyPr>
+          <a:lstStyle/>
+          <a:p>
+            <a:r>
+              <a:rPr sz="2600" b="1">
+                <a:solidFill>
+                  <a:srgbClr val="0B3D2E"/>
+                </a:solidFill>
+              </a:rPr>
+              <a:t>❓ Preguntas frecuentes</a:t>
+            </a:r>
+          </a:p>
+        </p:txBody>
+      </p:sp>
+      <p:sp>
+        <p:nvSpPr>
+          <p:cNvPr id="3" name="TextBox 2"/>
+          <p:cNvSpPr txBox="1"/>
+          <p:nvPr/>
+        </p:nvSpPr>
+        <p:spPr>
+          <a:xfrm>
+            <a:off x="457200" y="1280160"/>
+            <a:ext cx="8229600" cy="4937760"/>
+          </a:xfrm>
+          <a:prstGeom prst="rect">
+            <a:avLst/>
+          </a:prstGeom>
+          <a:noFill/>
+        </p:spPr>
+        <p:txBody>
+          <a:bodyPr wrap="square">
+            <a:spAutoFit/>
+          </a:bodyPr>
+          <a:lstStyle/>
+          <a:p>
+            <a:pPr>
+              <a:spcAft>
+                <a:spcPts val="600"/>
+              </a:spcAft>
+            </a:pPr>
+            <a:r>
+              <a:rPr sz="1500">
+                <a:solidFill>
+                  <a:srgbClr val="22282E"/>
+                </a:solidFill>
+              </a:rPr>
+              <a:t>•  ❓ ¿El reconocimiento pasivo es 100% indetectable?</a:t>
+            </a:r>
+          </a:p>
+          <a:p>
+            <a:pPr>
+              <a:spcAft>
+                <a:spcPts val="600"/>
+              </a:spcAft>
+            </a:pPr>
+            <a:r>
+              <a:rPr sz="1500">
+                <a:solidFill>
+                  <a:srgbClr val="22282E"/>
+                </a:solidFill>
+              </a:rPr>
+              <a:t>•  Casi. No genera tráfico contra el objetivo, pero consultas a terceros (Shodan, brechas) pueden dejar rastro en esos servicios, no en el objetivo. Aun así es mucho más sigiloso que el escaneo activo.</a:t>
+            </a:r>
+          </a:p>
+          <a:p>
+            <a:pPr>
+              <a:spcAft>
+                <a:spcPts val="600"/>
+              </a:spcAft>
+            </a:pPr>
+            <a:r>
+              <a:rPr sz="1500">
+                <a:solidFill>
+                  <a:srgbClr val="22282E"/>
+                </a:solidFill>
+              </a:rPr>
+              <a:t>•  ❓ ¿Es legal usar bases de datos de contraseñas filtradas?</a:t>
+            </a:r>
+          </a:p>
+          <a:p>
+            <a:pPr>
+              <a:spcAft>
+                <a:spcPts val="600"/>
+              </a:spcAft>
+            </a:pPr>
+            <a:r>
+              <a:rPr sz="1500">
+                <a:solidFill>
+                  <a:srgbClr val="22282E"/>
+                </a:solidFill>
+              </a:rPr>
+              <a:t>•  Consultar si un correo aparece en una brecha (p. ej. Have I Been Pwned) es legal e informativo. Usar esas contraseñas para acceder a cuentas reales fuera de tu laboratorio no lo es.</a:t>
+            </a:r>
+          </a:p>
+          <a:p>
+            <a:pPr>
+              <a:spcAft>
+                <a:spcPts val="600"/>
+              </a:spcAft>
+            </a:pPr>
+            <a:r>
+              <a:rPr sz="1500">
+                <a:solidFill>
+                  <a:srgbClr val="22282E"/>
+                </a:solidFill>
+              </a:rPr>
+              <a:t>•  ❓ ¿Qué diferencia hay entre amass pasivo y activo?</a:t>
+            </a:r>
+          </a:p>
+          <a:p>
+            <a:pPr>
+              <a:spcAft>
+                <a:spcPts val="600"/>
+              </a:spcAft>
+            </a:pPr>
+            <a:r>
+              <a:rPr sz="1500">
+                <a:solidFill>
+                  <a:srgbClr val="22282E"/>
+                </a:solidFill>
+              </a:rPr>
+              <a:t>•  -passive solo consulta fuentes de terceros; el modo activo resuelve y puede hacer brute force de DNS, generando tráfico. Para esta clase, quédate en pasivo.</a:t>
+            </a:r>
+          </a:p>
+          <a:p>
+            <a:pPr>
+              <a:spcAft>
+                <a:spcPts val="600"/>
+              </a:spcAft>
+            </a:pPr>
+            <a:r>
+              <a:rPr sz="1500">
+                <a:solidFill>
+                  <a:srgbClr val="22282E"/>
+                </a:solidFill>
+              </a:rPr>
+              <a:t>•  ❓ ¿Por qué importan los metadatos de documentos?</a:t>
+            </a:r>
+          </a:p>
+        </p:txBody>
+      </p:sp>
+    </p:spTree>
+  </p:cSld>
+  <p:clrMapOvr>
+    <a:masterClrMapping/>
+  </p:clrMapOvr>
+</p:sld>
+</file>
+
+<file path=ppt/slides/slide14.xml><?xml version="1.0" encoding="utf-8"?>
+<p:sld xmlns:a="http://schemas.openxmlformats.org/drawingml/2006/main" xmlns:p="http://schemas.openxmlformats.org/presentationml/2006/main" xmlns:r="http://schemas.openxmlformats.org/officeDocument/2006/relationships">
+  <p:cSld>
+    <p:spTree>
+      <p:nvGrpSpPr>
+        <p:cNvPr id="1" name=""/>
+        <p:cNvGrpSpPr/>
+        <p:nvPr/>
+      </p:nvGrpSpPr>
+      <p:grpSpPr/>
+      <p:sp>
+        <p:nvSpPr>
+          <p:cNvPr id="2" name="TextBox 1"/>
+          <p:cNvSpPr txBox="1"/>
+          <p:nvPr/>
+        </p:nvSpPr>
+        <p:spPr>
+          <a:xfrm>
+            <a:off x="457200" y="320040"/>
+            <a:ext cx="8229600" cy="822960"/>
+          </a:xfrm>
+          <a:prstGeom prst="rect">
+            <a:avLst/>
+          </a:prstGeom>
+          <a:noFill/>
+        </p:spPr>
+        <p:txBody>
+          <a:bodyPr wrap="square">
+            <a:spAutoFit/>
+          </a:bodyPr>
+          <a:lstStyle/>
+          <a:p>
+            <a:r>
+              <a:rPr sz="2600" b="1">
+                <a:solidFill>
+                  <a:srgbClr val="0B3D2E"/>
+                </a:solidFill>
+              </a:rPr>
+              <a:t>🔗 Referencias</a:t>
+            </a:r>
+          </a:p>
+        </p:txBody>
+      </p:sp>
+      <p:sp>
+        <p:nvSpPr>
+          <p:cNvPr id="3" name="TextBox 2"/>
+          <p:cNvSpPr txBox="1"/>
+          <p:nvPr/>
+        </p:nvSpPr>
+        <p:spPr>
+          <a:xfrm>
+            <a:off x="457200" y="1280160"/>
+            <a:ext cx="8229600" cy="4937760"/>
+          </a:xfrm>
+          <a:prstGeom prst="rect">
+            <a:avLst/>
+          </a:prstGeom>
+          <a:noFill/>
+        </p:spPr>
+        <p:txBody>
+          <a:bodyPr wrap="square">
+            <a:spAutoFit/>
+          </a:bodyPr>
+          <a:lstStyle/>
+          <a:p>
+            <a:pPr>
+              <a:spcAft>
+                <a:spcPts val="600"/>
+              </a:spcAft>
+            </a:pPr>
+            <a:r>
+              <a:rPr sz="1500">
+                <a:solidFill>
+                  <a:srgbClr val="22282E"/>
+                </a:solidFill>
+              </a:rPr>
               <a:t>•  Kim, P. The Hacker Playbook 3, sección de recon (2018).</a:t>
             </a:r>
           </a:p>
@@ -3629,6 +3900,81 @@
           </a:p>
         </p:txBody>
       </p:sp>
+    </p:spTree>
+  </p:cSld>
+  <p:clrMapOvr>
+    <a:masterClrMapping/>
+  </p:clrMapOvr>
+</p:sld>
+</file>
+
+<file path=ppt/slides/slide15.xml><?xml version="1.0" encoding="utf-8"?>
+<p:sld xmlns:a="http://schemas.openxmlformats.org/drawingml/2006/main" xmlns:p="http://schemas.openxmlformats.org/presentationml/2006/main" xmlns:r="http://schemas.openxmlformats.org/officeDocument/2006/relationships">
+  <p:cSld>
+    <p:spTree>
+      <p:nvGrpSpPr>
+        <p:cNvPr id="1" name=""/>
+        <p:cNvGrpSpPr/>
+        <p:nvPr/>
+      </p:nvGrpSpPr>
+      <p:grpSpPr/>
+      <p:sp>
+        <p:nvSpPr>
+          <p:cNvPr id="2" name="TextBox 1"/>
+          <p:cNvSpPr txBox="1"/>
+          <p:nvPr/>
+        </p:nvSpPr>
+        <p:spPr>
+          <a:xfrm>
+            <a:off x="457200" y="274320"/>
+            <a:ext cx="8229600" cy="640080"/>
+          </a:xfrm>
+          <a:prstGeom prst="rect">
+            <a:avLst/>
+          </a:prstGeom>
+          <a:noFill/>
+        </p:spPr>
+        <p:txBody>
+          <a:bodyPr wrap="square">
+            <a:spAutoFit/>
+          </a:bodyPr>
+          <a:lstStyle/>
+          <a:p>
+            <a:r>
+              <a:rPr sz="2200" b="1">
+                <a:solidFill>
+                  <a:srgbClr val="0B3D2E"/>
+                </a:solidFill>
+              </a:rPr>
+              <a:t>Diagrama de la clase</a:t>
+            </a:r>
+          </a:p>
+        </p:txBody>
+      </p:sp>
+      <p:pic>
+        <p:nvPicPr>
+          <p:cNvPr id="3" name="Picture 2" descr="6ed13f96abd25fdf.png"/>
+          <p:cNvPicPr>
+            <a:picLocks noChangeAspect="1"/>
+          </p:cNvPicPr>
+          <p:nvPr/>
+        </p:nvPicPr>
+        <p:blipFill>
+          <a:blip r:embed="rId2"/>
+          <a:stretch>
+            <a:fillRect/>
+          </a:stretch>
+        </p:blipFill>
+        <p:spPr>
+          <a:xfrm>
+            <a:off x="457200" y="2775204"/>
+            <a:ext cx="8229600" cy="1947672"/>
+          </a:xfrm>
+          <a:prstGeom prst="rect">
+            <a:avLst/>
+          </a:prstGeom>
+        </p:spPr>
+      </p:pic>
     </p:spTree>
   </p:cSld>
   <p:clrMapOvr>
@@ -3713,7 +4059,7 @@
                   <a:srgbClr val="22282E"/>
                 </a:solidFill>
               </a:rPr>
-              <a:t>•  Recolectar información sobre un objetivo sin tocarlo directamente, usando fuentes públicas (OSINT): dominios, subdominios, empleados, tecnologías, filtraciones y metadatos. El reconocimiento pasivo construye el mapa antes de que el escáner activo levante alarmas.</a:t>
+              <a:t>•  Recolectar información sobre un objetivo sin tocarlo directamente, usando fuentes públicas (OSINT): dominios, subdominios, empleados, tecnologías, filtraciones y metadatos. El reconocimiento pasivo…</a:t>
             </a:r>
           </a:p>
         </p:txBody>
@@ -4107,7 +4453,7 @@
                   <a:srgbClr val="0B3D2E"/>
                 </a:solidFill>
               </a:rPr>
-              <a:t>📖 Definiciones y características</a:t>
+              <a:t>🧠 Explicación en profundidad</a:t>
             </a:r>
           </a:p>
         </p:txBody>
@@ -4145,82 +4491,97 @@
                   <a:srgbClr val="22282E"/>
                 </a:solidFill>
               </a:rPr>
-              <a:t>•  OSINT: inteligencia obtenida de fuentes abiertas y legales. Característica clave: no requiere interactuar con la infraestructura del objetivo.</a:t>
-            </a:r>
-          </a:p>
-          <a:p>
-            <a:pPr>
-              <a:spcAft>
-                <a:spcPts val="600"/>
-              </a:spcAft>
-            </a:pPr>
-            <a:r>
-              <a:rPr sz="1500">
-                <a:solidFill>
-                  <a:srgbClr val="22282E"/>
-                </a:solidFill>
-              </a:rPr>
-              <a:t>•  Certificate Transparency: registros públicos de certificados TLS emitidos. Característica clave: exponen subdominios que el objetivo no publicita.</a:t>
-            </a:r>
-          </a:p>
-          <a:p>
-            <a:pPr>
-              <a:spcAft>
-                <a:spcPts val="600"/>
-              </a:spcAft>
-            </a:pPr>
-            <a:r>
-              <a:rPr sz="1500">
-                <a:solidFill>
-                  <a:srgbClr val="22282E"/>
-                </a:solidFill>
-              </a:rPr>
-              <a:t>•  Shodan: buscador de dispositivos conectados a Internet. Característica clave: indexa banners de servicios, versiones y puertos ya conocidos.</a:t>
-            </a:r>
-          </a:p>
-          <a:p>
-            <a:pPr>
-              <a:spcAft>
-                <a:spcPts val="600"/>
-              </a:spcAft>
-            </a:pPr>
-            <a:r>
-              <a:rPr sz="1500">
-                <a:solidFill>
-                  <a:srgbClr val="22282E"/>
-                </a:solidFill>
-              </a:rPr>
-              <a:t>•  Google dorking: uso de operadores avanzados de búsqueda (site:, filetype:, intitle:). Característica clave: encuentra documentos y paneles expuestos por error.</a:t>
-            </a:r>
-          </a:p>
-          <a:p>
-            <a:pPr>
-              <a:spcAft>
-                <a:spcPts val="600"/>
-              </a:spcAft>
-            </a:pPr>
-            <a:r>
-              <a:rPr sz="1500">
-                <a:solidFill>
-                  <a:srgbClr val="22282E"/>
-                </a:solidFill>
-              </a:rPr>
-              <a:t>•  Metadatos: información incrustada en documentos (autor, software, rutas). Característica clave: revelan nombres de usuario y estructura interna.</a:t>
-            </a:r>
-          </a:p>
-          <a:p>
-            <a:pPr>
-              <a:spcAft>
-                <a:spcPts val="600"/>
-              </a:spcAft>
-            </a:pPr>
-            <a:r>
-              <a:rPr sz="1500">
-                <a:solidFill>
-                  <a:srgbClr val="22282E"/>
-                </a:solidFill>
-              </a:rPr>
-              <a:t>•  Reconocimiento pasivo: fase que no genera tráfico dirigido al objetivo. Característica clave: minimiza la probabilidad de detección temprana.</a:t>
+              <a:t>•  El reconocimiento pasivo reúne información sobre el objetivo sin enviarle un solo</a:t>
+            </a:r>
+          </a:p>
+          <a:p>
+            <a:pPr>
+              <a:spcAft>
+                <a:spcPts val="600"/>
+              </a:spcAft>
+            </a:pPr>
+            <a:r>
+              <a:rPr sz="1500">
+                <a:solidFill>
+                  <a:srgbClr val="22282E"/>
+                </a:solidFill>
+              </a:rPr>
+              <a:t>•  paquete. Toda la recolección se hace contra terceros —registros públicos, buscadores,</a:t>
+            </a:r>
+          </a:p>
+          <a:p>
+            <a:pPr>
+              <a:spcAft>
+                <a:spcPts val="600"/>
+              </a:spcAft>
+            </a:pPr>
+            <a:r>
+              <a:rPr sz="1500">
+                <a:solidFill>
+                  <a:srgbClr val="22282E"/>
+                </a:solidFill>
+              </a:rPr>
+              <a:t>•  bases de datos indexadas, redes sociales—, de modo que el objetivo no tiene forma de saber</a:t>
+            </a:r>
+          </a:p>
+          <a:p>
+            <a:pPr>
+              <a:spcAft>
+                <a:spcPts val="600"/>
+              </a:spcAft>
+            </a:pPr>
+            <a:r>
+              <a:rPr sz="1500">
+                <a:solidFill>
+                  <a:srgbClr val="22282E"/>
+                </a:solidFill>
+              </a:rPr>
+              <a:t>•  que está siendo estudiado. Esa invisibilidad es su valor: en un ejercicio con requisitos de</a:t>
+            </a:r>
+          </a:p>
+          <a:p>
+            <a:pPr>
+              <a:spcAft>
+                <a:spcPts val="600"/>
+              </a:spcAft>
+            </a:pPr>
+            <a:r>
+              <a:rPr sz="1500">
+                <a:solidFill>
+                  <a:srgbClr val="22282E"/>
+                </a:solidFill>
+              </a:rPr>
+              <a:t>•  sigilo, o simplemente para no alertar antes de tiempo, el recon pasivo construye un mapa</a:t>
+            </a:r>
+          </a:p>
+          <a:p>
+            <a:pPr>
+              <a:spcAft>
+                <a:spcPts val="600"/>
+              </a:spcAft>
+            </a:pPr>
+            <a:r>
+              <a:rPr sz="1500">
+                <a:solidFill>
+                  <a:srgbClr val="22282E"/>
+                </a:solidFill>
+              </a:rPr>
+              <a:t>•  sorprendentemente completo antes de tocar nada. La frontera es nítida y conviene tenerla</a:t>
+            </a:r>
+          </a:p>
+          <a:p>
+            <a:pPr>
+              <a:spcAft>
+                <a:spcPts val="600"/>
+              </a:spcAft>
+            </a:pPr>
+            <a:r>
+              <a:rPr sz="1500">
+                <a:solidFill>
+                  <a:srgbClr val="22282E"/>
+                </a:solidFill>
+              </a:rPr>
+              <a:t>•  clara: en cuanto una consulta llega al servidor del objetivo (una petición a su web, una</a:t>
             </a:r>
           </a:p>
         </p:txBody>
@@ -4271,7 +4632,7 @@
                   <a:srgbClr val="0B3D2E"/>
                 </a:solidFill>
               </a:rPr>
-              <a:t>🧰 Herramientas y preparación</a:t>
+              <a:t>📖 Definiciones y características</a:t>
             </a:r>
           </a:p>
         </p:txBody>
@@ -4309,97 +4670,82 @@
                   <a:srgbClr val="22282E"/>
                 </a:solidFill>
               </a:rPr>
-              <a:t>•  En Kali Linux:</a:t>
-            </a:r>
-          </a:p>
-          <a:p>
-            <a:pPr>
-              <a:spcAft>
-                <a:spcPts val="600"/>
-              </a:spcAft>
-            </a:pPr>
-            <a:r>
-              <a:rPr sz="1500">
-                <a:solidFill>
-                  <a:srgbClr val="22282E"/>
-                </a:solidFill>
-              </a:rPr>
-              <a:t>•  sudo apt update &amp;&amp; sudo apt install -y theharvester whois dnsutils amass</a:t>
-            </a:r>
-          </a:p>
-          <a:p>
-            <a:pPr>
-              <a:spcAft>
-                <a:spcPts val="600"/>
-              </a:spcAft>
-            </a:pPr>
-            <a:r>
-              <a:rPr sz="1500">
-                <a:solidFill>
-                  <a:srgbClr val="22282E"/>
-                </a:solidFill>
-              </a:rPr>
-              <a:t>•  pip install shodan &amp;&amp; shodan init &lt;APIKEY&gt;   # cuenta gratuita</a:t>
-            </a:r>
-          </a:p>
-          <a:p>
-            <a:pPr>
-              <a:spcAft>
-                <a:spcPts val="600"/>
-              </a:spcAft>
-            </a:pPr>
-            <a:r>
-              <a:rPr sz="1500">
-                <a:solidFill>
-                  <a:srgbClr val="22282E"/>
-                </a:solidFill>
-              </a:rPr>
-              <a:t>•  theHarvester para correos, subdominios y hosts.</a:t>
-            </a:r>
-          </a:p>
-          <a:p>
-            <a:pPr>
-              <a:spcAft>
-                <a:spcPts val="600"/>
-              </a:spcAft>
-            </a:pPr>
-            <a:r>
-              <a:rPr sz="1500">
-                <a:solidFill>
-                  <a:srgbClr val="22282E"/>
-                </a:solidFill>
-              </a:rPr>
-              <a:t>•  whois, dig, host para DNS.</a:t>
-            </a:r>
-          </a:p>
-          <a:p>
-            <a:pPr>
-              <a:spcAft>
-                <a:spcPts val="600"/>
-              </a:spcAft>
-            </a:pPr>
-            <a:r>
-              <a:rPr sz="1500">
-                <a:solidFill>
-                  <a:srgbClr val="22282E"/>
-                </a:solidFill>
-              </a:rPr>
-              <a:t>•  amass enum -passive para enumeración pasiva de subdominios.</a:t>
-            </a:r>
-          </a:p>
-          <a:p>
-            <a:pPr>
-              <a:spcAft>
-                <a:spcPts val="600"/>
-              </a:spcAft>
-            </a:pPr>
-            <a:r>
-              <a:rPr sz="1500">
-                <a:solidFill>
-                  <a:srgbClr val="22282E"/>
-                </a:solidFill>
-              </a:rPr>
-              <a:t>•  crt.sh (web) para certificados; Shodan/Censys para servicios expuestos.</a:t>
+              <a:t>•  OSINT: inteligencia obtenida de fuentes abiertas y legales. Característica clave: no requiere interactuar con la infraestructura del objetivo.</a:t>
+            </a:r>
+          </a:p>
+          <a:p>
+            <a:pPr>
+              <a:spcAft>
+                <a:spcPts val="600"/>
+              </a:spcAft>
+            </a:pPr>
+            <a:r>
+              <a:rPr sz="1500">
+                <a:solidFill>
+                  <a:srgbClr val="22282E"/>
+                </a:solidFill>
+              </a:rPr>
+              <a:t>•  Certificate Transparency: registros públicos de certificados TLS emitidos. Característica clave: exponen subdominios que el objetivo no publicita.</a:t>
+            </a:r>
+          </a:p>
+          <a:p>
+            <a:pPr>
+              <a:spcAft>
+                <a:spcPts val="600"/>
+              </a:spcAft>
+            </a:pPr>
+            <a:r>
+              <a:rPr sz="1500">
+                <a:solidFill>
+                  <a:srgbClr val="22282E"/>
+                </a:solidFill>
+              </a:rPr>
+              <a:t>•  Shodan: buscador de dispositivos conectados a Internet. Característica clave: indexa banners de servicios, versiones y puertos ya conocidos.</a:t>
+            </a:r>
+          </a:p>
+          <a:p>
+            <a:pPr>
+              <a:spcAft>
+                <a:spcPts val="600"/>
+              </a:spcAft>
+            </a:pPr>
+            <a:r>
+              <a:rPr sz="1500">
+                <a:solidFill>
+                  <a:srgbClr val="22282E"/>
+                </a:solidFill>
+              </a:rPr>
+              <a:t>•  Google dorking: uso de operadores avanzados de búsqueda (site:, filetype:, intitle:). Característica clave: encuentra documentos y paneles expuestos por error.</a:t>
+            </a:r>
+          </a:p>
+          <a:p>
+            <a:pPr>
+              <a:spcAft>
+                <a:spcPts val="600"/>
+              </a:spcAft>
+            </a:pPr>
+            <a:r>
+              <a:rPr sz="1500">
+                <a:solidFill>
+                  <a:srgbClr val="22282E"/>
+                </a:solidFill>
+              </a:rPr>
+              <a:t>•  Metadatos: información incrustada en documentos (autor, software, rutas). Característica clave: revelan nombres de usuario y estructura interna.</a:t>
+            </a:r>
+          </a:p>
+          <a:p>
+            <a:pPr>
+              <a:spcAft>
+                <a:spcPts val="600"/>
+              </a:spcAft>
+            </a:pPr>
+            <a:r>
+              <a:rPr sz="1500">
+                <a:solidFill>
+                  <a:srgbClr val="22282E"/>
+                </a:solidFill>
+              </a:rPr>
+              <a:t>•  Reconocimiento pasivo: fase que no genera tráfico dirigido al objetivo. Característica clave: minimiza la probabilidad de detección temprana.</a:t>
             </a:r>
           </a:p>
         </p:txBody>
@@ -4450,7 +4796,7 @@
                   <a:srgbClr val="0B3D2E"/>
                 </a:solidFill>
               </a:rPr>
-              <a:t>🧪 Laboratorio guiado</a:t>
+              <a:t>📔 Glosario</a:t>
             </a:r>
           </a:p>
         </p:txBody>
@@ -4488,97 +4834,97 @@
                   <a:srgbClr val="22282E"/>
                 </a:solidFill>
               </a:rPr>
-              <a:t>•  Usa un dominio propio o uno autorizado (por ejemplo, example.com para practicar comandos sin impacto).</a:t>
-            </a:r>
-          </a:p>
-          <a:p>
-            <a:pPr>
-              <a:spcAft>
-                <a:spcPts val="600"/>
-              </a:spcAft>
-            </a:pPr>
-            <a:r>
-              <a:rPr sz="1500">
-                <a:solidFill>
-                  <a:srgbClr val="22282E"/>
-                </a:solidFill>
-              </a:rPr>
-              <a:t>•  WHOIS del dominio para ver registrador y fechas:</a:t>
-            </a:r>
-          </a:p>
-          <a:p>
-            <a:pPr>
-              <a:spcAft>
-                <a:spcPts val="600"/>
-              </a:spcAft>
-            </a:pPr>
-            <a:r>
-              <a:rPr sz="1500">
-                <a:solidFill>
-                  <a:srgbClr val="22282E"/>
-                </a:solidFill>
-              </a:rPr>
-              <a:t>•  whois example.com</a:t>
-            </a:r>
-          </a:p>
-          <a:p>
-            <a:pPr>
-              <a:spcAft>
-                <a:spcPts val="600"/>
-              </a:spcAft>
-            </a:pPr>
-            <a:r>
-              <a:rPr sz="1500">
-                <a:solidFill>
-                  <a:srgbClr val="22282E"/>
-                </a:solidFill>
-              </a:rPr>
-              <a:t>•  Registros DNS básicos:</a:t>
-            </a:r>
-          </a:p>
-          <a:p>
-            <a:pPr>
-              <a:spcAft>
-                <a:spcPts val="600"/>
-              </a:spcAft>
-            </a:pPr>
-            <a:r>
-              <a:rPr sz="1500">
-                <a:solidFill>
-                  <a:srgbClr val="22282E"/>
-                </a:solidFill>
-              </a:rPr>
-              <a:t>•  dig example.com ANY +noall +answer</a:t>
-            </a:r>
-          </a:p>
-          <a:p>
-            <a:pPr>
-              <a:spcAft>
-                <a:spcPts val="600"/>
-              </a:spcAft>
-            </a:pPr>
-            <a:r>
-              <a:rPr sz="1500">
-                <a:solidFill>
-                  <a:srgbClr val="22282E"/>
-                </a:solidFill>
-              </a:rPr>
-              <a:t>•  dig MX example.com +short</a:t>
-            </a:r>
-          </a:p>
-          <a:p>
-            <a:pPr>
-              <a:spcAft>
-                <a:spcPts val="600"/>
-              </a:spcAft>
-            </a:pPr>
-            <a:r>
-              <a:rPr sz="1500">
-                <a:solidFill>
-                  <a:srgbClr val="22282E"/>
-                </a:solidFill>
-              </a:rPr>
-              <a:t>•  Subdominios pasivos con crt.sh (vía web o API):</a:t>
+              <a:t>•  Término — Definición concisa</a:t>
+            </a:r>
+          </a:p>
+          <a:p>
+            <a:pPr>
+              <a:spcAft>
+                <a:spcPts val="600"/>
+              </a:spcAft>
+            </a:pPr>
+            <a:r>
+              <a:rPr sz="1500">
+                <a:solidFill>
+                  <a:srgbClr val="22282E"/>
+                </a:solidFill>
+              </a:rPr>
+              <a:t>•  Reconocimiento pasivo — Recolección sin enviar tráfico al objetivo</a:t>
+            </a:r>
+          </a:p>
+          <a:p>
+            <a:pPr>
+              <a:spcAft>
+                <a:spcPts val="600"/>
+              </a:spcAft>
+            </a:pPr>
+            <a:r>
+              <a:rPr sz="1500">
+                <a:solidFill>
+                  <a:srgbClr val="22282E"/>
+                </a:solidFill>
+              </a:rPr>
+              <a:t>•  OSINT — Inteligencia a partir de fuentes abiertas</a:t>
+            </a:r>
+          </a:p>
+          <a:p>
+            <a:pPr>
+              <a:spcAft>
+                <a:spcPts val="600"/>
+              </a:spcAft>
+            </a:pPr>
+            <a:r>
+              <a:rPr sz="1500">
+                <a:solidFill>
+                  <a:srgbClr val="22282E"/>
+                </a:solidFill>
+              </a:rPr>
+              <a:t>•  WHOIS / RDAP — Propietario, contactos y rangos de un dominio o IP</a:t>
+            </a:r>
+          </a:p>
+          <a:p>
+            <a:pPr>
+              <a:spcAft>
+                <a:spcPts val="600"/>
+              </a:spcAft>
+            </a:pPr>
+            <a:r>
+              <a:rPr sz="1500">
+                <a:solidFill>
+                  <a:srgbClr val="22282E"/>
+                </a:solidFill>
+              </a:rPr>
+              <a:t>•  Registros DNS públicos — MX, TXT, SPF que revelan infraestructura</a:t>
+            </a:r>
+          </a:p>
+          <a:p>
+            <a:pPr>
+              <a:spcAft>
+                <a:spcPts val="600"/>
+              </a:spcAft>
+            </a:pPr>
+            <a:r>
+              <a:rPr sz="1500">
+                <a:solidFill>
+                  <a:srgbClr val="22282E"/>
+                </a:solidFill>
+              </a:rPr>
+              <a:t>•  Certificate Transparency — Registros públicos de certificados emitidos</a:t>
+            </a:r>
+          </a:p>
+          <a:p>
+            <a:pPr>
+              <a:spcAft>
+                <a:spcPts val="600"/>
+              </a:spcAft>
+            </a:pPr>
+            <a:r>
+              <a:rPr sz="1500">
+                <a:solidFill>
+                  <a:srgbClr val="22282E"/>
+                </a:solidFill>
+              </a:rPr>
+              <a:t>•  crt.sh — Buscador de CT usado para enumerar subdominios</a:t>
             </a:r>
           </a:p>
         </p:txBody>
@@ -4629,7 +4975,7 @@
                   <a:srgbClr val="0B3D2E"/>
                 </a:solidFill>
               </a:rPr>
-              <a:t>✍️ Ejercicios</a:t>
+              <a:t>🧰 Herramientas y preparación</a:t>
             </a:r>
           </a:p>
         </p:txBody>
@@ -4667,82 +5013,67 @@
                   <a:srgbClr val="22282E"/>
                 </a:solidFill>
               </a:rPr>
-              <a:t>•  Encuentra tres subdominios de un dominio propio usando solo crt.sh.</a:t>
-            </a:r>
-          </a:p>
-          <a:p>
-            <a:pPr>
-              <a:spcAft>
-                <a:spcPts val="600"/>
-              </a:spcAft>
-            </a:pPr>
-            <a:r>
-              <a:rPr sz="1500">
-                <a:solidFill>
-                  <a:srgbClr val="22282E"/>
-                </a:solidFill>
-              </a:rPr>
-              <a:t>•  Escribe tres Google dorks para localizar documentos PDF de una organización.</a:t>
-            </a:r>
-          </a:p>
-          <a:p>
-            <a:pPr>
-              <a:spcAft>
-                <a:spcPts val="600"/>
-              </a:spcAft>
-            </a:pPr>
-            <a:r>
-              <a:rPr sz="1500">
-                <a:solidFill>
-                  <a:srgbClr val="22282E"/>
-                </a:solidFill>
-              </a:rPr>
-              <a:t>•  Extrae los registros MX y explica qué proveedor de correo usan.</a:t>
-            </a:r>
-          </a:p>
-          <a:p>
-            <a:pPr>
-              <a:spcAft>
-                <a:spcPts val="600"/>
-              </a:spcAft>
-            </a:pPr>
-            <a:r>
-              <a:rPr sz="1500">
-                <a:solidFill>
-                  <a:srgbClr val="22282E"/>
-                </a:solidFill>
-              </a:rPr>
-              <a:t>•  Compara el resultado de amass -passive con theHarvester: ¿qué aporta cada uno?</a:t>
-            </a:r>
-          </a:p>
-          <a:p>
-            <a:pPr>
-              <a:spcAft>
-                <a:spcPts val="600"/>
-              </a:spcAft>
-            </a:pPr>
-            <a:r>
-              <a:rPr sz="1500">
-                <a:solidFill>
-                  <a:srgbClr val="22282E"/>
-                </a:solidFill>
-              </a:rPr>
-              <a:t>•  Documenta qué metadatos podrías extraer de un PDF público (autor, software).</a:t>
-            </a:r>
-          </a:p>
-          <a:p>
-            <a:pPr>
-              <a:spcAft>
-                <a:spcPts val="600"/>
-              </a:spcAft>
-            </a:pPr>
-            <a:r>
-              <a:rPr sz="1500">
-                <a:solidFill>
-                  <a:srgbClr val="22282E"/>
-                </a:solidFill>
-              </a:rPr>
-              <a:t>•  Explica cómo un correo filtrado en una brecha se convierte en vector de acceso.</a:t>
+              <a:t>•  En Kali Linux:</a:t>
+            </a:r>
+          </a:p>
+          <a:p>
+            <a:pPr>
+              <a:spcAft>
+                <a:spcPts val="600"/>
+              </a:spcAft>
+            </a:pPr>
+            <a:r>
+              <a:rPr sz="1500">
+                <a:solidFill>
+                  <a:srgbClr val="22282E"/>
+                </a:solidFill>
+              </a:rPr>
+              <a:t>•  theHarvester para correos, subdominios y hosts.</a:t>
+            </a:r>
+          </a:p>
+          <a:p>
+            <a:pPr>
+              <a:spcAft>
+                <a:spcPts val="600"/>
+              </a:spcAft>
+            </a:pPr>
+            <a:r>
+              <a:rPr sz="1500">
+                <a:solidFill>
+                  <a:srgbClr val="22282E"/>
+                </a:solidFill>
+              </a:rPr>
+              <a:t>•  whois, dig, host para DNS.</a:t>
+            </a:r>
+          </a:p>
+          <a:p>
+            <a:pPr>
+              <a:spcAft>
+                <a:spcPts val="600"/>
+              </a:spcAft>
+            </a:pPr>
+            <a:r>
+              <a:rPr sz="1500">
+                <a:solidFill>
+                  <a:srgbClr val="22282E"/>
+                </a:solidFill>
+              </a:rPr>
+              <a:t>•  amass enum -passive para enumeración pasiva de subdominios.</a:t>
+            </a:r>
+          </a:p>
+          <a:p>
+            <a:pPr>
+              <a:spcAft>
+                <a:spcPts val="600"/>
+              </a:spcAft>
+            </a:pPr>
+            <a:r>
+              <a:rPr sz="1500">
+                <a:solidFill>
+                  <a:srgbClr val="22282E"/>
+                </a:solidFill>
+              </a:rPr>
+              <a:t>•  crt.sh (web) para certificados; Shodan/Censys para servicios expuestos.</a:t>
             </a:r>
           </a:p>
         </p:txBody>
@@ -4793,7 +5124,7 @@
                   <a:srgbClr val="0B3D2E"/>
                 </a:solidFill>
               </a:rPr>
-              <a:t>📝 Reto verificable</a:t>
+              <a:t>🧪 Laboratorio guiado</a:t>
             </a:r>
           </a:p>
         </p:txBody>
@@ -4831,22 +5162,97 @@
                   <a:srgbClr val="22282E"/>
                 </a:solidFill>
               </a:rPr>
-              <a:t>•  Genera un informe de reconocimiento pasivo de un dominio propio con: registros WHOIS/DNS, al menos cinco subdominios con su fuente, servicios expuestos y una lista de correos/usuarios candidatos.</a:t>
-            </a:r>
-          </a:p>
-          <a:p>
-            <a:pPr>
-              <a:spcAft>
-                <a:spcPts val="600"/>
-              </a:spcAft>
-            </a:pPr>
-            <a:r>
-              <a:rPr sz="1500">
-                <a:solidFill>
-                  <a:srgbClr val="22282E"/>
-                </a:solidFill>
-              </a:rPr>
-              <a:t>•  Criterio de aceptación: el informe lista ≥5 subdominios con la fuente de cada uno, incluye al menos un servicio expuesto identificado por Shodan/Censys y no contiene ninguna acción que haya generado tráfico dirigido al objetivo.</a:t>
+              <a:t>•  Usa un dominio propio o uno autorizado (por ejemplo, example.com para practicar comandos sin impacto).</a:t>
+            </a:r>
+          </a:p>
+          <a:p>
+            <a:pPr>
+              <a:spcAft>
+                <a:spcPts val="600"/>
+              </a:spcAft>
+            </a:pPr>
+            <a:r>
+              <a:rPr sz="1500">
+                <a:solidFill>
+                  <a:srgbClr val="22282E"/>
+                </a:solidFill>
+              </a:rPr>
+              <a:t>•  WHOIS del dominio para ver registrador y fechas:</a:t>
+            </a:r>
+          </a:p>
+          <a:p>
+            <a:pPr>
+              <a:spcAft>
+                <a:spcPts val="600"/>
+              </a:spcAft>
+            </a:pPr>
+            <a:r>
+              <a:rPr sz="1500">
+                <a:solidFill>
+                  <a:srgbClr val="22282E"/>
+                </a:solidFill>
+              </a:rPr>
+              <a:t>•  Registros DNS básicos:</a:t>
+            </a:r>
+          </a:p>
+          <a:p>
+            <a:pPr>
+              <a:spcAft>
+                <a:spcPts val="600"/>
+              </a:spcAft>
+            </a:pPr>
+            <a:r>
+              <a:rPr sz="1500">
+                <a:solidFill>
+                  <a:srgbClr val="22282E"/>
+                </a:solidFill>
+              </a:rPr>
+              <a:t>•  Subdominios pasivos con crt.sh (vía web o API):</a:t>
+            </a:r>
+          </a:p>
+          <a:p>
+            <a:pPr>
+              <a:spcAft>
+                <a:spcPts val="600"/>
+              </a:spcAft>
+            </a:pPr>
+            <a:r>
+              <a:rPr sz="1500">
+                <a:solidFill>
+                  <a:srgbClr val="22282E"/>
+                </a:solidFill>
+              </a:rPr>
+              <a:t>•  Enumeración pasiva con amass:</a:t>
+            </a:r>
+          </a:p>
+          <a:p>
+            <a:pPr>
+              <a:spcAft>
+                <a:spcPts val="600"/>
+              </a:spcAft>
+            </a:pPr>
+            <a:r>
+              <a:rPr sz="1500">
+                <a:solidFill>
+                  <a:srgbClr val="22282E"/>
+                </a:solidFill>
+              </a:rPr>
+              <a:t>•  Correos y hosts con theHarvester:</a:t>
+            </a:r>
+          </a:p>
+          <a:p>
+            <a:pPr>
+              <a:spcAft>
+                <a:spcPts val="600"/>
+              </a:spcAft>
+            </a:pPr>
+            <a:r>
+              <a:rPr sz="1500">
+                <a:solidFill>
+                  <a:srgbClr val="22282E"/>
+                </a:solidFill>
+              </a:rPr>
+              <a:t>•  Consulta Shodan sobre una IP propia:</a:t>
             </a:r>
           </a:p>
         </p:txBody>
